--- a/data/examples/demo_pitch.pptx
+++ b/data/examples/demo_pitch.pptx
@@ -28,12 +28,20 @@
       <p:grpSpPr/>
     </p:spTree>
   </p:cSld>
+  <p:clrMapOvr>
+    <a:masterClrMapping/>
+  </p:clrMapOvr>
 </p:sldLayout>
 </file>
 
 <file path=ppt/slideMasters/slideMaster1.xml><?xml version="1.0" encoding="utf-8"?>
 <p:sldMaster xmlns:a="http://schemas.openxmlformats.org/drawingml/2006/main" xmlns:r="http://schemas.openxmlformats.org/officeDocument/2006/relationships" xmlns:p="http://schemas.openxmlformats.org/presentationml/2006/main">
   <p:cSld>
+    <p:bg>
+      <p:bgRef idx="1001">
+        <a:schemeClr val="bg1"/>
+      </p:bgRef>
+    </p:bg>
     <p:spTree>
       <p:nvGrpSpPr>
         <p:cNvPr id="1" name=""/>
@@ -43,6 +51,7 @@
       <p:grpSpPr/>
     </p:spTree>
   </p:cSld>
+  <p:clrMap bg1="lt1" tx1="dk1" bg2="lt2" tx2="dk2" accent1="accent1" accent2="accent2" accent3="accent3" accent4="accent4" accent5="accent5" accent6="accent6" hlink="hlink" folHlink="folHlink"/>
   <p:sldLayoutIdLst>
     <p:sldLayoutId id="2147483649" r:id="rId1"/>
   </p:sldLayoutIdLst>
@@ -81,7 +90,7 @@
             <a:pPr algn="ctr"/>
             <a:r>
               <a:rPr lang="en-US" sz="2800" b="1"/>
-              <a:t>DocParse</a:t>
+              <a:t>EcoSense: Intelligent Energy Management for Modern Homes</a:t>
             </a:r>
           </a:p>
         </p:txBody>
@@ -107,13 +116,16 @@
           <a:p>
             <a:r>
               <a:rPr lang="en-US" sz="1800"/>
-              <a:t>Unlocking insights from your unstructured documents</a:t>
+              <a:t>Optimizing comfort, savings, and sustainability through AI.</a:t>
             </a:r>
           </a:p>
         </p:txBody>
       </p:sp>
     </p:spTree>
   </p:cSld>
+  <p:clrMapOvr>
+    <a:masterClrMapping/>
+  </p:clrMapOvr>
 </p:sld>
 </file>
 
@@ -149,7 +161,7 @@
             <a:pPr algn="ctr"/>
             <a:r>
               <a:rPr lang="en-US" sz="2800" b="1"/>
-              <a:t>The Problem: Document Overload &amp; Data Silos</a:t>
+              <a:t>The Growing Energy Challenge</a:t>
             </a:r>
           </a:p>
         </p:txBody>
@@ -175,37 +187,40 @@
           <a:p>
             <a:r>
               <a:rPr lang="en-US" sz="1800"/>
-              <a:t>u2022 Manual data entry leads to errors and delays.</a:t>
-            </a:r>
-          </a:p>
-          <a:p>
-            <a:r>
-              <a:rPr lang="en-US" sz="1800"/>
-              <a:t>u2022 Valuable information trapped in PDFs, images, and scanned documents.</a:t>
-            </a:r>
-          </a:p>
-          <a:p>
-            <a:r>
-              <a:rPr lang="en-US" sz="1800"/>
-              <a:t>u2022 Time-consuming and costly document processing workflows.</a:t>
-            </a:r>
-          </a:p>
-          <a:p>
-            <a:r>
-              <a:rPr lang="en-US" sz="1800"/>
-              <a:t>u2022 Lack of real-time insights from critical business documents.</a:t>
-            </a:r>
-          </a:p>
-          <a:p>
-            <a:r>
-              <a:rPr lang="en-US" sz="1800"/>
-              <a:t>u2022 Inconsistent data formats hinder integration and analysis.</a:t>
+              <a:t>• High and unpredictable utility bills impacting household budgets.</a:t>
+            </a:r>
+          </a:p>
+          <a:p>
+            <a:r>
+              <a:rPr lang="en-US" sz="1800"/>
+              <a:t>• Lack of real-time visibility into energy consumption patterns.</a:t>
+            </a:r>
+          </a:p>
+          <a:p>
+            <a:r>
+              <a:rPr lang="en-US" sz="1800"/>
+              <a:t>• Significant wasted energy due to inefficient appliance usage and settings.</a:t>
+            </a:r>
+          </a:p>
+          <a:p>
+            <a:r>
+              <a:rPr lang="en-US" sz="1800"/>
+              <a:t>• Difficulty integrating various smart home devices for holistic energy optimization.</a:t>
+            </a:r>
+          </a:p>
+          <a:p>
+            <a:r>
+              <a:rPr lang="en-US" sz="1800"/>
+              <a:t>• Increasing environmental concerns related to residential energy footprints.</a:t>
             </a:r>
           </a:p>
         </p:txBody>
       </p:sp>
     </p:spTree>
   </p:cSld>
+  <p:clrMapOvr>
+    <a:masterClrMapping/>
+  </p:clrMapOvr>
 </p:sld>
 </file>
 
@@ -241,7 +256,7 @@
             <a:pPr algn="ctr"/>
             <a:r>
               <a:rPr lang="en-US" sz="2800" b="1"/>
-              <a:t>DocParse: Your Intelligent Document Automation Partner</a:t>
+              <a:t>Introducing EcoSense: Your Smart Energy Partner</a:t>
             </a:r>
           </a:p>
         </p:txBody>
@@ -267,47 +282,20 @@
           <a:p>
             <a:r>
               <a:rPr lang="en-US" sz="1800"/>
-              <a:t>DocParse leverages advanced AI and machine learning to automatically extract, classify, and validate data from various document types, transforming unstructured information into structured, actionable data for your business systems.</a:t>
-            </a:r>
-          </a:p>
-        </p:txBody>
-      </p:sp>
-      <p:sp>
-        <p:nvSpPr>
-          <p:cNvPr id="4" name="Title 4"/>
+              <a:t>EcoSense is an AI-powered platform that learns your home's energy patterns, automates optimizations, and provides actionable insights to significantly reduce consumption and costs.</a:t>
+            </a:r>
+          </a:p>
+        </p:txBody>
+      </p:sp>
+      <p:sp>
+        <p:nvSpPr>
+          <p:cNvPr id="4" name="List 4"/>
           <p:cNvSpPr txBox="1"/>
           <p:nvPr/>
         </p:nvSpPr>
         <p:spPr>
           <a:xfrm>
             <a:off x="457200" y="3600000"/>
-            <a:ext cx="8229600" cy="800000"/>
-          </a:xfrm>
-          <a:prstGeom prst="rect">
-            <a:avLst/>
-          </a:prstGeom>
-        </p:spPr>
-        <p:txBody>
-          <a:bodyPr wrap="square" rtlCol="0"/>
-          <a:lstStyle/>
-          <a:p>
-            <a:pPr algn="ctr"/>
-            <a:r>
-              <a:rPr lang="en-US" sz="2800" b="1"/>
-              <a:t>Key Features</a:t>
-            </a:r>
-          </a:p>
-        </p:txBody>
-      </p:sp>
-      <p:sp>
-        <p:nvSpPr>
-          <p:cNvPr id="5" name="List 5"/>
-          <p:cNvSpPr txBox="1"/>
-          <p:nvPr/>
-        </p:nvSpPr>
-        <p:spPr>
-          <a:xfrm>
-            <a:off x="457200" y="4800000"/>
             <a:ext cx="8229600" cy="1000000"/>
           </a:xfrm>
           <a:prstGeom prst="rect">
@@ -320,37 +308,40 @@
           <a:p>
             <a:r>
               <a:rPr lang="en-US" sz="1800"/>
-              <a:t>u2022 AI-Powered Data Extraction: Accurately pulls key data points from diverse document layouts.</a:t>
-            </a:r>
-          </a:p>
-          <a:p>
-            <a:r>
-              <a:rPr lang="en-US" sz="1800"/>
-              <a:t>u2022 Intelligent Document Classification: Automatically categorizes documents for efficient routing.</a:t>
-            </a:r>
-          </a:p>
-          <a:p>
-            <a:r>
-              <a:rPr lang="en-US" sz="1800"/>
-              <a:t>u2022 Customizable Validation Rules: Ensures data accuracy and compliance with business logic.</a:t>
-            </a:r>
-          </a:p>
-          <a:p>
-            <a:r>
-              <a:rPr lang="en-US" sz="1800"/>
-              <a:t>u2022 Seamless System Integrations: Connects with your CRM, ERP, and other business applications via APIs.</a:t>
-            </a:r>
-          </a:p>
-          <a:p>
-            <a:r>
-              <a:rPr lang="en-US" sz="1800"/>
-              <a:t>u2022 Scalable Cloud-Native Architecture: Processes millions of documents with enterprise-grade security.</a:t>
+              <a:t>• AI-Driven Optimization: Intelligently learns usage habits and adjusts settings autonomously for peak efficiency.</a:t>
+            </a:r>
+          </a:p>
+          <a:p>
+            <a:r>
+              <a:rPr lang="en-US" sz="1800"/>
+              <a:t>• Real-time Monitoring &amp; Analytics: Comprehensive dashboard for live energy consumption across all connected devices.</a:t>
+            </a:r>
+          </a:p>
+          <a:p>
+            <a:r>
+              <a:rPr lang="en-US" sz="1800"/>
+              <a:t>• Predictive Cost Forecasting: Anticipates future energy needs and potential costs based on historical data and weather.</a:t>
+            </a:r>
+          </a:p>
+          <a:p>
+            <a:r>
+              <a:rPr lang="en-US" sz="1800"/>
+              <a:t>• Seamless Device Integration: Connects effortlessly with popular smart thermostats, smart plugs, and solar panel systems.</a:t>
+            </a:r>
+          </a:p>
+          <a:p>
+            <a:r>
+              <a:rPr lang="en-US" sz="1800"/>
+              <a:t>• Personalized Savings Reports: Detailed breakdowns of energy reduction, cost savings, and environmental impact.</a:t>
             </a:r>
           </a:p>
         </p:txBody>
       </p:sp>
     </p:spTree>
   </p:cSld>
+  <p:clrMapOvr>
+    <a:masterClrMapping/>
+  </p:clrMapOvr>
 </p:sld>
 </file>
 
@@ -386,7 +377,7 @@
             <a:pPr algn="ctr"/>
             <a:r>
               <a:rPr lang="en-US" sz="2800" b="1"/>
-              <a:t>Why DocParse Stands Out</a:t>
+              <a:t>EcoSense vs. The Competition</a:t>
             </a:r>
           </a:p>
         </p:txBody>
@@ -434,7 +425,7 @@
                     <a:p>
                       <a:r>
                         <a:rPr lang="en-US" b="1"/>
-                        <a:t>Manual Process</a:t>
+                        <a:t>EcoSense</a:t>
                       </a:r>
                     </a:p>
                   </a:txBody>
@@ -447,7 +438,7 @@
                     <a:p>
                       <a:r>
                         <a:rPr lang="en-US" b="1"/>
-                        <a:t>Legacy OCR Solutions</a:t>
+                        <a:t>Competitor A (Smart Thermostat)</a:t>
                       </a:r>
                     </a:p>
                   </a:txBody>
@@ -460,7 +451,7 @@
                     <a:p>
                       <a:r>
                         <a:rPr lang="en-US" b="1"/>
-                        <a:t>DocParse</a:t>
+                        <a:t>Competitor B (Basic Monitor)</a:t>
                       </a:r>
                     </a:p>
                   </a:txBody>
@@ -475,46 +466,46 @@
                     <a:p>
                       <a:r>
                         <a:rPr lang="en-US"/>
-                        <a:t>Accuracy</a:t>
-                      </a:r>
-                    </a:p>
-                  </a:txBody>
-                  <a:tcPr/>
-                </a:tc>
-                <a:tc>
-                  <a:txBody>
-                    <a:bodyPr/>
-                    <a:lstStyle/>
-                    <a:p>
-                      <a:r>
-                        <a:rPr lang="en-US"/>
-                        <a:t>Low (Human error)</a:t>
-                      </a:r>
-                    </a:p>
-                  </a:txBody>
-                  <a:tcPr/>
-                </a:tc>
-                <a:tc>
-                  <a:txBody>
-                    <a:bodyPr/>
-                    <a:lstStyle/>
-                    <a:p>
-                      <a:r>
-                        <a:rPr lang="en-US"/>
-                        <a:t>Moderate (Template-dependent)</a:t>
-                      </a:r>
-                    </a:p>
-                  </a:txBody>
-                  <a:tcPr/>
-                </a:tc>
-                <a:tc>
-                  <a:txBody>
-                    <a:bodyPr/>
-                    <a:lstStyle/>
-                    <a:p>
-                      <a:r>
-                        <a:rPr lang="en-US"/>
-                        <a:t>High (AI-driven learning)</a:t>
+                        <a:t>AI-Driven Optimization</a:t>
+                      </a:r>
+                    </a:p>
+                  </a:txBody>
+                  <a:tcPr/>
+                </a:tc>
+                <a:tc>
+                  <a:txBody>
+                    <a:bodyPr/>
+                    <a:lstStyle/>
+                    <a:p>
+                      <a:r>
+                        <a:rPr lang="en-US"/>
+                        <a:t>Advanced &amp; Holistic</a:t>
+                      </a:r>
+                    </a:p>
+                  </a:txBody>
+                  <a:tcPr/>
+                </a:tc>
+                <a:tc>
+                  <a:txBody>
+                    <a:bodyPr/>
+                    <a:lstStyle/>
+                    <a:p>
+                      <a:r>
+                        <a:rPr lang="en-US"/>
+                        <a:t>Limited to HVAC</a:t>
+                      </a:r>
+                    </a:p>
+                  </a:txBody>
+                  <a:tcPr/>
+                </a:tc>
+                <a:tc>
+                  <a:txBody>
+                    <a:bodyPr/>
+                    <a:lstStyle/>
+                    <a:p>
+                      <a:r>
+                        <a:rPr lang="en-US"/>
+                        <a:t>None</a:t>
                       </a:r>
                     </a:p>
                   </a:txBody>
@@ -529,46 +520,46 @@
                     <a:p>
                       <a:r>
                         <a:rPr lang="en-US"/>
-                        <a:t>Processing Speed</a:t>
-                      </a:r>
-                    </a:p>
-                  </a:txBody>
-                  <a:tcPr/>
-                </a:tc>
-                <a:tc>
-                  <a:txBody>
-                    <a:bodyPr/>
-                    <a:lstStyle/>
-                    <a:p>
-                      <a:r>
-                        <a:rPr lang="en-US"/>
-                        <a:t>Slow</a:t>
-                      </a:r>
-                    </a:p>
-                  </a:txBody>
-                  <a:tcPr/>
-                </a:tc>
-                <a:tc>
-                  <a:txBody>
-                    <a:bodyPr/>
-                    <a:lstStyle/>
-                    <a:p>
-                      <a:r>
-                        <a:rPr lang="en-US"/>
-                        <a:t>Moderate</a:t>
-                      </a:r>
-                    </a:p>
-                  </a:txBody>
-                  <a:tcPr/>
-                </a:tc>
-                <a:tc>
-                  <a:txBody>
-                    <a:bodyPr/>
-                    <a:lstStyle/>
-                    <a:p>
-                      <a:r>
-                        <a:rPr lang="en-US"/>
-                        <a:t>Very Fast (Automated at scale)</a:t>
+                        <a:t>Real-time Device Monitoring</a:t>
+                      </a:r>
+                    </a:p>
+                  </a:txBody>
+                  <a:tcPr/>
+                </a:tc>
+                <a:tc>
+                  <a:txBody>
+                    <a:bodyPr/>
+                    <a:lstStyle/>
+                    <a:p>
+                      <a:r>
+                        <a:rPr lang="en-US"/>
+                        <a:t>Granular, per-device</a:t>
+                      </a:r>
+                    </a:p>
+                  </a:txBody>
+                  <a:tcPr/>
+                </a:tc>
+                <a:tc>
+                  <a:txBody>
+                    <a:bodyPr/>
+                    <a:lstStyle/>
+                    <a:p>
+                      <a:r>
+                        <a:rPr lang="en-US"/>
+                        <a:t>Aggregate only</a:t>
+                      </a:r>
+                    </a:p>
+                  </a:txBody>
+                  <a:tcPr/>
+                </a:tc>
+                <a:tc>
+                  <a:txBody>
+                    <a:bodyPr/>
+                    <a:lstStyle/>
+                    <a:p>
+                      <a:r>
+                        <a:rPr lang="en-US"/>
+                        <a:t>Basic, house-wide</a:t>
                       </a:r>
                     </a:p>
                   </a:txBody>
@@ -583,46 +574,46 @@
                     <a:p>
                       <a:r>
                         <a:rPr lang="en-US"/>
-                        <a:t>Document Types</a:t>
-                      </a:r>
-                    </a:p>
-                  </a:txBody>
-                  <a:tcPr/>
-                </a:tc>
-                <a:tc>
-                  <a:txBody>
-                    <a:bodyPr/>
-                    <a:lstStyle/>
-                    <a:p>
-                      <a:r>
-                        <a:rPr lang="en-US"/>
-                        <a:t>Limited (Specific forms)</a:t>
-                      </a:r>
-                    </a:p>
-                  </a:txBody>
-                  <a:tcPr/>
-                </a:tc>
-                <a:tc>
-                  <a:txBody>
-                    <a:bodyPr/>
-                    <a:lstStyle/>
-                    <a:p>
-                      <a:r>
-                        <a:rPr lang="en-US"/>
-                        <a:t>Limited (Structured/Fixed templates)</a:t>
-                      </a:r>
-                    </a:p>
-                  </a:txBody>
-                  <a:tcPr/>
-                </a:tc>
-                <a:tc>
-                  <a:txBody>
-                    <a:bodyPr/>
-                    <a:lstStyle/>
-                    <a:p>
-                      <a:r>
-                        <a:rPr lang="en-US"/>
-                        <a:t>Broad (Structured, semi-structured, unstructured)</a:t>
+                        <a:t>Predictive Analytics</a:t>
+                      </a:r>
+                    </a:p>
+                  </a:txBody>
+                  <a:tcPr/>
+                </a:tc>
+                <a:tc>
+                  <a:txBody>
+                    <a:bodyPr/>
+                    <a:lstStyle/>
+                    <a:p>
+                      <a:r>
+                        <a:rPr lang="en-US"/>
+                        <a:t>Comprehensive, future-focused</a:t>
+                      </a:r>
+                    </a:p>
+                  </a:txBody>
+                  <a:tcPr/>
+                </a:tc>
+                <a:tc>
+                  <a:txBody>
+                    <a:bodyPr/>
+                    <a:lstStyle/>
+                    <a:p>
+                      <a:r>
+                        <a:rPr lang="en-US"/>
+                        <a:t>No</a:t>
+                      </a:r>
+                    </a:p>
+                  </a:txBody>
+                  <a:tcPr/>
+                </a:tc>
+                <a:tc>
+                  <a:txBody>
+                    <a:bodyPr/>
+                    <a:lstStyle/>
+                    <a:p>
+                      <a:r>
+                        <a:rPr lang="en-US"/>
+                        <a:t>No</a:t>
                       </a:r>
                     </a:p>
                   </a:txBody>
@@ -637,46 +628,100 @@
                     <a:p>
                       <a:r>
                         <a:rPr lang="en-US"/>
-                        <a:t>Integration</a:t>
-                      </a:r>
-                    </a:p>
-                  </a:txBody>
-                  <a:tcPr/>
-                </a:tc>
-                <a:tc>
-                  <a:txBody>
-                    <a:bodyPr/>
-                    <a:lstStyle/>
-                    <a:p>
-                      <a:r>
-                        <a:rPr lang="en-US"/>
-                        <a:t>None</a:t>
-                      </a:r>
-                    </a:p>
-                  </a:txBody>
-                  <a:tcPr/>
-                </a:tc>
-                <a:tc>
-                  <a:txBody>
-                    <a:bodyPr/>
-                    <a:lstStyle/>
-                    <a:p>
-                      <a:r>
-                        <a:rPr lang="en-US"/>
-                        <a:t>Basic (CSV/JSON export)</a:t>
-                      </a:r>
-                    </a:p>
-                  </a:txBody>
-                  <a:tcPr/>
-                </a:tc>
-                <a:tc>
-                  <a:txBody>
-                    <a:bodyPr/>
-                    <a:lstStyle/>
-                    <a:p>
-                      <a:r>
-                        <a:rPr lang="en-US"/>
-                        <a:t>Extensive (APIs, webhooks, RPA-ready)</a:t>
+                        <a:t>Multi-device Integration</a:t>
+                      </a:r>
+                    </a:p>
+                  </a:txBody>
+                  <a:tcPr/>
+                </a:tc>
+                <a:tc>
+                  <a:txBody>
+                    <a:bodyPr/>
+                    <a:lstStyle/>
+                    <a:p>
+                      <a:r>
+                        <a:rPr lang="en-US"/>
+                        <a:t>Extensive (thermostats, plugs, solar)</a:t>
+                      </a:r>
+                    </a:p>
+                  </a:txBody>
+                  <a:tcPr/>
+                </a:tc>
+                <a:tc>
+                  <a:txBody>
+                    <a:bodyPr/>
+                    <a:lstStyle/>
+                    <a:p>
+                      <a:r>
+                        <a:rPr lang="en-US"/>
+                        <a:t>Proprietary Ecosystem</a:t>
+                      </a:r>
+                    </a:p>
+                  </a:txBody>
+                  <a:tcPr/>
+                </a:tc>
+                <a:tc>
+                  <a:txBody>
+                    <a:bodyPr/>
+                    <a:lstStyle/>
+                    <a:p>
+                      <a:r>
+                        <a:rPr lang="en-US"/>
+                        <a:t>Limited (via third-party apps)</a:t>
+                      </a:r>
+                    </a:p>
+                  </a:txBody>
+                  <a:tcPr/>
+                </a:tc>
+              </a:tr>
+              <a:tr h="370840">
+                <a:tc>
+                  <a:txBody>
+                    <a:bodyPr/>
+                    <a:lstStyle/>
+                    <a:p>
+                      <a:r>
+                        <a:rPr lang="en-US"/>
+                        <a:t>Average Savings Potential</a:t>
+                      </a:r>
+                    </a:p>
+                  </a:txBody>
+                  <a:tcPr/>
+                </a:tc>
+                <a:tc>
+                  <a:txBody>
+                    <a:bodyPr/>
+                    <a:lstStyle/>
+                    <a:p>
+                      <a:r>
+                        <a:rPr lang="en-US"/>
+                        <a:t>20-30%</a:t>
+                      </a:r>
+                    </a:p>
+                  </a:txBody>
+                  <a:tcPr/>
+                </a:tc>
+                <a:tc>
+                  <a:txBody>
+                    <a:bodyPr/>
+                    <a:lstStyle/>
+                    <a:p>
+                      <a:r>
+                        <a:rPr lang="en-US"/>
+                        <a:t>5-10%</a:t>
+                      </a:r>
+                    </a:p>
+                  </a:txBody>
+                  <a:tcPr/>
+                </a:tc>
+                <a:tc>
+                  <a:txBody>
+                    <a:bodyPr/>
+                    <a:lstStyle/>
+                    <a:p>
+                      <a:r>
+                        <a:rPr lang="en-US"/>
+                        <a:t>&lt;5%</a:t>
                       </a:r>
                     </a:p>
                   </a:txBody>
@@ -689,6 +734,9 @@
       </p:graphicFrame>
     </p:spTree>
   </p:cSld>
+  <p:clrMapOvr>
+    <a:masterClrMapping/>
+  </p:clrMapOvr>
 </p:sld>
 </file>
 
@@ -724,7 +772,7 @@
             <a:pPr algn="ctr"/>
             <a:r>
               <a:rPr lang="en-US" sz="2800" b="1"/>
-              <a:t>Transform Your Document Workflow Today!</a:t>
+              <a:t>Join the EcoSense Movement</a:t>
             </a:r>
           </a:p>
         </p:txBody>
@@ -750,7 +798,7 @@
           <a:p>
             <a:r>
               <a:rPr lang="en-US" sz="1800"/>
-              <a:t>Ready to unlock the full potential of your documents and streamline your operations? DocParse provides a robust, scalable solution designed for modern enterprises seeking efficiency and data accuracy.</a:t>
+              <a:t>We are currently seeking a $1.5M seed round to scale our platform, expand market reach, and further develop our AI capabilities.</a:t>
             </a:r>
           </a:p>
         </p:txBody>
@@ -776,38 +824,67 @@
           <a:p>
             <a:r>
               <a:rPr lang="en-US" sz="1800"/>
-              <a:t>u2022 Request a Free Demo</a:t>
-            </a:r>
-          </a:p>
-          <a:p>
-            <a:r>
-              <a:rPr lang="en-US" sz="1800"/>
-              <a:t>u2022 Download Our Whitepaper on AI Document Processing</a:t>
-            </a:r>
-          </a:p>
-          <a:p>
-            <a:r>
-              <a:rPr lang="en-US" sz="1800"/>
-              <a:t>u2022 Visit DocParse.com to learn more</a:t>
-            </a:r>
-          </a:p>
-          <a:p>
-            <a:r>
-              <a:rPr lang="en-US" sz="1800"/>
-              <a:t>u2022 Contact Us: sales@docparse.com</a:t>
+              <a:t>• Invest in a sustainable future and a rapidly growing smart home market.</a:t>
+            </a:r>
+          </a:p>
+          <a:p>
+            <a:r>
+              <a:rPr lang="en-US" sz="1800"/>
+              <a:t>• Partner with us to revolutionize home energy management and consumer savings.</a:t>
+            </a:r>
+          </a:p>
+          <a:p>
+            <a:r>
+              <a:rPr lang="en-US" sz="1800"/>
+              <a:t>• Schedule a live demonstration to experience EcoSense firsthand.</a:t>
+            </a:r>
+          </a:p>
+          <a:p>
+            <a:r>
+              <a:rPr lang="en-US" sz="1800"/>
+              <a:t>• Contact us today to learn more about this exciting opportunity.</a:t>
+            </a:r>
+          </a:p>
+        </p:txBody>
+      </p:sp>
+      <p:sp>
+        <p:nvSpPr>
+          <p:cNvPr id="5" name="Text 5"/>
+          <p:cNvSpPr txBox="1"/>
+          <p:nvPr/>
+        </p:nvSpPr>
+        <p:spPr>
+          <a:xfrm>
+            <a:off x="457200" y="4800000"/>
+            <a:ext cx="8229600" cy="600000"/>
+          </a:xfrm>
+          <a:prstGeom prst="rect">
+            <a:avLst/>
+          </a:prstGeom>
+        </p:spPr>
+        <p:txBody>
+          <a:bodyPr wrap="square" rtlCol="0"/>
+          <a:lstStyle/>
+          <a:p>
+            <a:r>
+              <a:rPr lang="en-US" sz="1800"/>
+              <a:t>Contact: investor@ecosense.com | +1 (555) 123-4567</a:t>
             </a:r>
           </a:p>
         </p:txBody>
       </p:sp>
     </p:spTree>
   </p:cSld>
+  <p:clrMapOvr>
+    <a:masterClrMapping/>
+  </p:clrMapOvr>
 </p:sld>
 </file>
 
 <file path=ppt/theme/theme1.xml><?xml version="1.0" encoding="utf-8"?>
-<a:theme xmlns:a="http://schemas.openxmlformats.org/drawingml/2006/main" name="DocParse">
+<a:theme xmlns:a="http://schemas.openxmlformats.org/drawingml/2006/main" name="AILANG Parse">
   <a:themeElements>
-    <a:clrScheme name="DocParse">
+    <a:clrScheme name="AILANG Parse">
       <a:dk1>
         <a:srgbClr val="000000"/>
       </a:dk1>
@@ -845,7 +922,7 @@
         <a:srgbClr val="800080"/>
       </a:folHlink>
     </a:clrScheme>
-    <a:fontScheme name="DocParse">
+    <a:fontScheme name="AILANG Parse">
       <a:majorFont>
         <a:latin typeface="Calibri"/>
         <a:ea typeface=""/>
@@ -857,7 +934,7 @@
         <a:cs typeface=""/>
       </a:minorFont>
     </a:fontScheme>
-    <a:fmtScheme name="DocParse">
+    <a:fmtScheme name="AILANG Parse">
       <a:fillStyleLst>
         <a:solidFill>
           <a:schemeClr val="phClr"/>
@@ -910,5 +987,7 @@
       </a:bgFillStyleLst>
     </a:fmtScheme>
   </a:themeElements>
+  <a:objectDefaults/>
+  <a:extraClrSchemeLst/>
 </a:theme>
 </file>